--- a/Reporte 120626.pptx
+++ b/Reporte 120626.pptx
@@ -5,7 +5,7 @@
     <p:sldMasterId id="2147483672" r:id="rId1"/>
   </p:sldMasterIdLst>
   <p:notesMasterIdLst>
-    <p:notesMasterId r:id="rId17"/>
+    <p:notesMasterId r:id="rId16"/>
   </p:notesMasterIdLst>
   <p:sldIdLst>
     <p:sldId id="350" r:id="rId2"/>
@@ -21,24 +21,23 @@
     <p:sldId id="369" r:id="rId12"/>
     <p:sldId id="361" r:id="rId13"/>
     <p:sldId id="371" r:id="rId14"/>
-    <p:sldId id="384" r:id="rId15"/>
-    <p:sldId id="280" r:id="rId16"/>
+    <p:sldId id="280" r:id="rId15"/>
   </p:sldIdLst>
   <p:sldSz cx="9144000" cy="5143500" type="screen16x9"/>
   <p:notesSz cx="6858000" cy="9144000"/>
   <p:embeddedFontLst>
     <p:embeddedFont>
       <p:font typeface="Montserrat" panose="00000500000000000000" pitchFamily="2" charset="0"/>
-      <p:regular r:id="rId18"/>
-      <p:bold r:id="rId19"/>
-      <p:italic r:id="rId20"/>
-      <p:boldItalic r:id="rId21"/>
+      <p:regular r:id="rId17"/>
+      <p:bold r:id="rId18"/>
+      <p:italic r:id="rId19"/>
+      <p:boldItalic r:id="rId20"/>
     </p:embeddedFont>
     <p:embeddedFont>
       <p:font typeface="Montserrat Black" panose="00000A00000000000000" pitchFamily="2" charset="0"/>
-      <p:bold r:id="rId22"/>
-      <p:italic r:id="rId23"/>
-      <p:boldItalic r:id="rId24"/>
+      <p:bold r:id="rId21"/>
+      <p:italic r:id="rId22"/>
+      <p:boldItalic r:id="rId23"/>
     </p:embeddedFont>
   </p:embeddedFontLst>
   <p:defaultTextStyle>
@@ -6233,7 +6232,7 @@
                 <a:latin typeface="Montserrat Black"/>
                 <a:sym typeface="Arial"/>
               </a:rPr>
-              <a:t>Elaborado: 10</a:t>
+              <a:t>Elaborado: 12</a:t>
             </a:r>
             <a:r>
               <a:rPr lang="es-MX" sz="1600" dirty="0">
@@ -6353,10 +6352,10 @@
       </p:sp>
       <p:pic>
         <p:nvPicPr>
-          <p:cNvPr id="4" name="Imagen 3">
+          <p:cNvPr id="3" name="Imagen 2">
             <a:extLst>
               <a:ext uri="{FF2B5EF4-FFF2-40B4-BE49-F238E27FC236}">
-                <a16:creationId xmlns:a16="http://schemas.microsoft.com/office/drawing/2014/main" id="{47B1CCB1-25C4-5EBF-07EC-5CCDE78A3503}"/>
+                <a16:creationId xmlns:a16="http://schemas.microsoft.com/office/drawing/2014/main" id="{0E0F9481-CAEF-E561-8415-5AE8EAFC0480}"/>
               </a:ext>
             </a:extLst>
           </p:cNvPr>
@@ -6373,8 +6372,8 @@
         </p:blipFill>
         <p:spPr>
           <a:xfrm>
-            <a:off x="0" y="1243177"/>
-            <a:ext cx="9144000" cy="2796023"/>
+            <a:off x="0" y="1318261"/>
+            <a:ext cx="9144000" cy="2649853"/>
           </a:xfrm>
           <a:prstGeom prst="rect">
             <a:avLst/>
@@ -6457,10 +6456,10 @@
       </p:sp>
       <p:pic>
         <p:nvPicPr>
-          <p:cNvPr id="3" name="Imagen 2">
+          <p:cNvPr id="4" name="Imagen 3">
             <a:extLst>
               <a:ext uri="{FF2B5EF4-FFF2-40B4-BE49-F238E27FC236}">
-                <a16:creationId xmlns:a16="http://schemas.microsoft.com/office/drawing/2014/main" id="{1E80485F-B1F0-C75D-71BD-09B6051EFA08}"/>
+                <a16:creationId xmlns:a16="http://schemas.microsoft.com/office/drawing/2014/main" id="{9CDB8B68-5CC7-B6FC-B35C-6E84C2323A6D}"/>
               </a:ext>
             </a:extLst>
           </p:cNvPr>
@@ -6477,8 +6476,8 @@
         </p:blipFill>
         <p:spPr>
           <a:xfrm>
-            <a:off x="0" y="785640"/>
-            <a:ext cx="9144000" cy="3817020"/>
+            <a:off x="0" y="709008"/>
+            <a:ext cx="9144000" cy="3868359"/>
           </a:xfrm>
           <a:prstGeom prst="rect">
             <a:avLst/>
@@ -6555,10 +6554,10 @@
       </p:sp>
       <p:pic>
         <p:nvPicPr>
-          <p:cNvPr id="5" name="Imagen 4">
+          <p:cNvPr id="4" name="Imagen 3">
             <a:extLst>
               <a:ext uri="{FF2B5EF4-FFF2-40B4-BE49-F238E27FC236}">
-                <a16:creationId xmlns:a16="http://schemas.microsoft.com/office/drawing/2014/main" id="{B29DA0A5-0799-A272-6109-8C4F3AE277ED}"/>
+                <a16:creationId xmlns:a16="http://schemas.microsoft.com/office/drawing/2014/main" id="{D8965500-E901-9CD2-299C-B86FA4B313D2}"/>
               </a:ext>
             </a:extLst>
           </p:cNvPr>
@@ -6575,8 +6574,8 @@
         </p:blipFill>
         <p:spPr>
           <a:xfrm>
-            <a:off x="0" y="1228022"/>
-            <a:ext cx="9144000" cy="2830332"/>
+            <a:off x="0" y="1277657"/>
+            <a:ext cx="9144000" cy="2731062"/>
           </a:xfrm>
           <a:prstGeom prst="rect">
             <a:avLst/>
@@ -6653,10 +6652,10 @@
       </p:sp>
       <p:pic>
         <p:nvPicPr>
-          <p:cNvPr id="3" name="Imagen 2">
+          <p:cNvPr id="4" name="Imagen 3">
             <a:extLst>
               <a:ext uri="{FF2B5EF4-FFF2-40B4-BE49-F238E27FC236}">
-                <a16:creationId xmlns:a16="http://schemas.microsoft.com/office/drawing/2014/main" id="{3DAEB4A9-006E-1A5B-0F9F-6FF22CB48928}"/>
+                <a16:creationId xmlns:a16="http://schemas.microsoft.com/office/drawing/2014/main" id="{B36BD9EE-C9DE-4313-74BF-DB357E88EE7B}"/>
               </a:ext>
             </a:extLst>
           </p:cNvPr>
@@ -6673,8 +6672,8 @@
         </p:blipFill>
         <p:spPr>
           <a:xfrm>
-            <a:off x="0" y="694633"/>
-            <a:ext cx="9144000" cy="3897110"/>
+            <a:off x="-1" y="614268"/>
+            <a:ext cx="9144000" cy="4057839"/>
           </a:xfrm>
           <a:prstGeom prst="rect">
             <a:avLst/>
@@ -6695,104 +6694,6 @@
 </file>
 
 <file path=ppt/slides/slide14.xml><?xml version="1.0" encoding="utf-8"?>
-<p:sld xmlns:a="http://schemas.openxmlformats.org/drawingml/2006/main" xmlns:r="http://schemas.openxmlformats.org/officeDocument/2006/relationships" xmlns:p="http://schemas.openxmlformats.org/presentationml/2006/main">
-  <p:cSld>
-    <p:spTree>
-      <p:nvGrpSpPr>
-        <p:cNvPr id="1" name=""/>
-        <p:cNvGrpSpPr/>
-        <p:nvPr/>
-      </p:nvGrpSpPr>
-      <p:grpSpPr>
-        <a:xfrm>
-          <a:off x="0" y="0"/>
-          <a:ext cx="0" cy="0"/>
-          <a:chOff x="0" y="0"/>
-          <a:chExt cx="0" cy="0"/>
-        </a:xfrm>
-      </p:grpSpPr>
-      <p:sp>
-        <p:nvSpPr>
-          <p:cNvPr id="4" name="CuadroTexto 3">
-            <a:extLst>
-              <a:ext uri="{FF2B5EF4-FFF2-40B4-BE49-F238E27FC236}">
-                <a16:creationId xmlns:a16="http://schemas.microsoft.com/office/drawing/2014/main" id="{5CA6E3AA-9467-5FF2-A182-F9C74DF835BA}"/>
-              </a:ext>
-            </a:extLst>
-          </p:cNvPr>
-          <p:cNvSpPr txBox="1"/>
-          <p:nvPr/>
-        </p:nvSpPr>
-        <p:spPr>
-          <a:xfrm>
-            <a:off x="1926166" y="0"/>
-            <a:ext cx="5291667" cy="307777"/>
-          </a:xfrm>
-          <a:prstGeom prst="rect">
-            <a:avLst/>
-          </a:prstGeom>
-          <a:noFill/>
-        </p:spPr>
-        <p:txBody>
-          <a:bodyPr wrap="square" rtlCol="0">
-            <a:spAutoFit/>
-          </a:bodyPr>
-          <a:lstStyle/>
-          <a:p>
-            <a:pPr algn="ctr"/>
-            <a:r>
-              <a:rPr lang="es-MX" b="1" dirty="0">
-                <a:latin typeface="Montserrat" pitchFamily="2" charset="0"/>
-              </a:rPr>
-              <a:t>Información emitida por radioescuchas</a:t>
-            </a:r>
-          </a:p>
-        </p:txBody>
-      </p:sp>
-      <p:pic>
-        <p:nvPicPr>
-          <p:cNvPr id="3" name="Imagen 2">
-            <a:extLst>
-              <a:ext uri="{FF2B5EF4-FFF2-40B4-BE49-F238E27FC236}">
-                <a16:creationId xmlns:a16="http://schemas.microsoft.com/office/drawing/2014/main" id="{2BB29E88-873F-8A20-1F5A-56C6BE03942B}"/>
-              </a:ext>
-            </a:extLst>
-          </p:cNvPr>
-          <p:cNvPicPr>
-            <a:picLocks noChangeAspect="1"/>
-          </p:cNvPicPr>
-          <p:nvPr/>
-        </p:nvPicPr>
-        <p:blipFill>
-          <a:blip r:embed="rId2"/>
-          <a:stretch>
-            <a:fillRect/>
-          </a:stretch>
-        </p:blipFill>
-        <p:spPr>
-          <a:xfrm>
-            <a:off x="0" y="1095703"/>
-            <a:ext cx="9144000" cy="3094970"/>
-          </a:xfrm>
-          <a:prstGeom prst="rect">
-            <a:avLst/>
-          </a:prstGeom>
-        </p:spPr>
-      </p:pic>
-    </p:spTree>
-    <p:extLst>
-      <p:ext uri="{BB962C8B-B14F-4D97-AF65-F5344CB8AC3E}">
-        <p14:creationId xmlns:p14="http://schemas.microsoft.com/office/powerpoint/2010/main" val="4087888137"/>
-      </p:ext>
-    </p:extLst>
-  </p:cSld>
-  <p:clrMapOvr>
-    <a:masterClrMapping/>
-  </p:clrMapOvr>
-</p:sld>
-</file>
-
-<file path=ppt/slides/slide15.xml><?xml version="1.0" encoding="utf-8"?>
 <p:sld xmlns:a="http://schemas.openxmlformats.org/drawingml/2006/main" xmlns:r="http://schemas.openxmlformats.org/officeDocument/2006/relationships" xmlns:p="http://schemas.openxmlformats.org/presentationml/2006/main">
   <p:cSld>
     <p:spTree>
@@ -6919,10 +6820,10 @@
       </p:sp>
       <p:pic>
         <p:nvPicPr>
-          <p:cNvPr id="10" name="Imagen 9">
+          <p:cNvPr id="5" name="Imagen 4">
             <a:extLst>
               <a:ext uri="{FF2B5EF4-FFF2-40B4-BE49-F238E27FC236}">
-                <a16:creationId xmlns:a16="http://schemas.microsoft.com/office/drawing/2014/main" id="{8814F35E-349A-7625-3EC2-29C1E9D5314A}"/>
+                <a16:creationId xmlns:a16="http://schemas.microsoft.com/office/drawing/2014/main" id="{56C211A3-504F-7068-9518-85930863F8C9}"/>
               </a:ext>
             </a:extLst>
           </p:cNvPr>
@@ -6939,8 +6840,8 @@
         </p:blipFill>
         <p:spPr>
           <a:xfrm>
-            <a:off x="0" y="928378"/>
-            <a:ext cx="9144000" cy="3429619"/>
+            <a:off x="0" y="866517"/>
+            <a:ext cx="9144000" cy="3410465"/>
           </a:xfrm>
           <a:prstGeom prst="rect">
             <a:avLst/>
@@ -7033,10 +6934,10 @@
       </p:sp>
       <p:pic>
         <p:nvPicPr>
-          <p:cNvPr id="6" name="Imagen 5">
+          <p:cNvPr id="3" name="Imagen 2">
             <a:extLst>
               <a:ext uri="{FF2B5EF4-FFF2-40B4-BE49-F238E27FC236}">
-                <a16:creationId xmlns:a16="http://schemas.microsoft.com/office/drawing/2014/main" id="{A6AA92F9-2B36-D36C-3F45-433EDC735B78}"/>
+                <a16:creationId xmlns:a16="http://schemas.microsoft.com/office/drawing/2014/main" id="{A80794A7-9973-8A12-DACC-ACA9E6DACE6D}"/>
               </a:ext>
             </a:extLst>
           </p:cNvPr>
@@ -7053,8 +6954,8 @@
         </p:blipFill>
         <p:spPr>
           <a:xfrm>
-            <a:off x="0" y="1413409"/>
-            <a:ext cx="9144000" cy="2459557"/>
+            <a:off x="0" y="1336342"/>
+            <a:ext cx="9144000" cy="2470815"/>
           </a:xfrm>
           <a:prstGeom prst="rect">
             <a:avLst/>
@@ -7147,10 +7048,10 @@
       </p:sp>
       <p:pic>
         <p:nvPicPr>
-          <p:cNvPr id="4" name="Imagen 3">
+          <p:cNvPr id="2" name="Imagen 1">
             <a:extLst>
               <a:ext uri="{FF2B5EF4-FFF2-40B4-BE49-F238E27FC236}">
-                <a16:creationId xmlns:a16="http://schemas.microsoft.com/office/drawing/2014/main" id="{D2F38C05-062C-3EBD-E462-D9940447EA52}"/>
+                <a16:creationId xmlns:a16="http://schemas.microsoft.com/office/drawing/2014/main" id="{4295C04C-A77D-3D49-7B6A-B3FD13BFD025}"/>
               </a:ext>
             </a:extLst>
           </p:cNvPr>
@@ -7167,8 +7068,8 @@
         </p:blipFill>
         <p:spPr>
           <a:xfrm>
-            <a:off x="796024" y="758464"/>
-            <a:ext cx="7478927" cy="3769448"/>
+            <a:off x="393242" y="555458"/>
+            <a:ext cx="8284492" cy="4175460"/>
           </a:xfrm>
           <a:prstGeom prst="rect">
             <a:avLst/>
@@ -7251,10 +7152,10 @@
       </p:sp>
       <p:pic>
         <p:nvPicPr>
-          <p:cNvPr id="5" name="Imagen 4">
+          <p:cNvPr id="3" name="Imagen 2">
             <a:extLst>
               <a:ext uri="{FF2B5EF4-FFF2-40B4-BE49-F238E27FC236}">
-                <a16:creationId xmlns:a16="http://schemas.microsoft.com/office/drawing/2014/main" id="{7763C4C0-5FED-283A-336F-BE93C4E3865B}"/>
+                <a16:creationId xmlns:a16="http://schemas.microsoft.com/office/drawing/2014/main" id="{9DAF6C3C-6F8C-81FF-E780-C26F2FD13DA6}"/>
               </a:ext>
             </a:extLst>
           </p:cNvPr>
@@ -7271,8 +7172,8 @@
         </p:blipFill>
         <p:spPr>
           <a:xfrm>
-            <a:off x="618573" y="985616"/>
-            <a:ext cx="7906853" cy="3172268"/>
+            <a:off x="539192" y="1409528"/>
+            <a:ext cx="7992590" cy="2467319"/>
           </a:xfrm>
           <a:prstGeom prst="rect">
             <a:avLst/>
@@ -7365,10 +7266,10 @@
       </p:sp>
       <p:pic>
         <p:nvPicPr>
-          <p:cNvPr id="3" name="Imagen 2">
+          <p:cNvPr id="4" name="Imagen 3">
             <a:extLst>
               <a:ext uri="{FF2B5EF4-FFF2-40B4-BE49-F238E27FC236}">
-                <a16:creationId xmlns:a16="http://schemas.microsoft.com/office/drawing/2014/main" id="{2F3A345E-6464-8536-8EA3-E4B1A192924A}"/>
+                <a16:creationId xmlns:a16="http://schemas.microsoft.com/office/drawing/2014/main" id="{B558FCB5-9D32-3A6D-A1F5-9907EB6A1C9F}"/>
               </a:ext>
             </a:extLst>
           </p:cNvPr>
@@ -7385,8 +7286,8 @@
         </p:blipFill>
         <p:spPr>
           <a:xfrm>
-            <a:off x="0" y="945369"/>
-            <a:ext cx="9144000" cy="3395637"/>
+            <a:off x="0" y="951769"/>
+            <a:ext cx="9144000" cy="3382837"/>
           </a:xfrm>
           <a:prstGeom prst="rect">
             <a:avLst/>
@@ -7479,10 +7380,10 @@
       </p:sp>
       <p:pic>
         <p:nvPicPr>
-          <p:cNvPr id="2" name="Imagen 1">
+          <p:cNvPr id="3" name="Imagen 2">
             <a:extLst>
               <a:ext uri="{FF2B5EF4-FFF2-40B4-BE49-F238E27FC236}">
-                <a16:creationId xmlns:a16="http://schemas.microsoft.com/office/drawing/2014/main" id="{98402326-FF3F-076F-40A8-1732B6471977}"/>
+                <a16:creationId xmlns:a16="http://schemas.microsoft.com/office/drawing/2014/main" id="{C91BA290-5165-7ECF-93A7-BCDB2F9D9845}"/>
               </a:ext>
             </a:extLst>
           </p:cNvPr>
@@ -7499,8 +7400,8 @@
         </p:blipFill>
         <p:spPr>
           <a:xfrm>
-            <a:off x="567457" y="701752"/>
-            <a:ext cx="7936062" cy="3999848"/>
+            <a:off x="1143000" y="914940"/>
+            <a:ext cx="6858000" cy="3456495"/>
           </a:xfrm>
           <a:prstGeom prst="rect">
             <a:avLst/>
@@ -7593,10 +7494,10 @@
       </p:sp>
       <p:pic>
         <p:nvPicPr>
-          <p:cNvPr id="3" name="Imagen 2">
+          <p:cNvPr id="2" name="Imagen 1">
             <a:extLst>
               <a:ext uri="{FF2B5EF4-FFF2-40B4-BE49-F238E27FC236}">
-                <a16:creationId xmlns:a16="http://schemas.microsoft.com/office/drawing/2014/main" id="{97F463AA-AC7E-13B1-9613-2B34937C260A}"/>
+                <a16:creationId xmlns:a16="http://schemas.microsoft.com/office/drawing/2014/main" id="{D70192C1-9806-998D-1A3B-2D0D9D9A82F7}"/>
               </a:ext>
             </a:extLst>
           </p:cNvPr>
@@ -7613,8 +7514,8 @@
         </p:blipFill>
         <p:spPr>
           <a:xfrm>
-            <a:off x="648818" y="523220"/>
-            <a:ext cx="7773340" cy="3917835"/>
+            <a:off x="1143000" y="914940"/>
+            <a:ext cx="6858000" cy="3456495"/>
           </a:xfrm>
           <a:prstGeom prst="rect">
             <a:avLst/>
@@ -7697,10 +7598,10 @@
       </p:sp>
       <p:pic>
         <p:nvPicPr>
-          <p:cNvPr id="5" name="Imagen 4">
+          <p:cNvPr id="4" name="Imagen 3">
             <a:extLst>
               <a:ext uri="{FF2B5EF4-FFF2-40B4-BE49-F238E27FC236}">
-                <a16:creationId xmlns:a16="http://schemas.microsoft.com/office/drawing/2014/main" id="{F381477E-D8C8-6EDB-06FC-28DC68A17509}"/>
+                <a16:creationId xmlns:a16="http://schemas.microsoft.com/office/drawing/2014/main" id="{9DB5107E-4928-A806-4E8B-75A91FD596F1}"/>
               </a:ext>
             </a:extLst>
           </p:cNvPr>
@@ -7717,8 +7618,8 @@
         </p:blipFill>
         <p:spPr>
           <a:xfrm>
-            <a:off x="0" y="881430"/>
-            <a:ext cx="9144000" cy="3523515"/>
+            <a:off x="0" y="786444"/>
+            <a:ext cx="9144000" cy="3570611"/>
           </a:xfrm>
           <a:prstGeom prst="rect">
             <a:avLst/>
